--- a/resources/pptx/post-pdhpe-s3.pptx
+++ b/resources/pptx/post-pdhpe-s3.pptx
@@ -7179,7 +7179,7 @@
                 </a:solidFill>
                 <a:latin typeface="Calibri"/>
               </a:rPr>
-              <a:t>You have 60 seconds to draw an animal from today's visit. Show your class and see if they can guess it!</a:t>
+              <a:t>You have 60 seconds to draw a Taronga Zoo animal. Show your class and see if they can guess it!</a:t>
             </a:r>
           </a:p>
         </p:txBody>
@@ -7941,7 +7941,7 @@
                 </a:solidFill>
                 <a:latin typeface="Calibri"/>
               </a:rPr>
-              <a:t>Describe one animal movement you observed today using at least two biomechanical terms.</a:t>
+              <a:t>Describe one animal movement you observed at Taronga Zoo using at least two biomechanical terms.</a:t>
             </a:r>
           </a:p>
         </p:txBody>
